--- a/Bias_Diffusion_v5.pptx
+++ b/Bias_Diffusion_v5.pptx
@@ -140,13 +140,220 @@
 <file path=ppt/revisionInfo.xml><?xml version="1.0" encoding="utf-8"?>
 <p1510:revInfo xmlns:a="http://schemas.openxmlformats.org/drawingml/2006/main" xmlns:r="http://schemas.openxmlformats.org/officeDocument/2006/relationships" xmlns:p1510="http://schemas.microsoft.com/office/powerpoint/2015/10/main">
   <p1510:revLst>
-    <p1510:client id="{2570E06C-6CDE-4131-A690-3FA8836EEC55}" v="333" dt="2024-01-25T18:31:00.305"/>
+    <p1510:client id="{01589B5E-0D6D-47FC-8B6E-F734D00DB5F1}" v="3" dt="2024-02-04T16:42:56.079"/>
+    <p1510:client id="{E7F114A3-2290-493E-A215-0EC9B9C80270}" v="6" dt="2024-02-03T20:36:16.293"/>
   </p1510:revLst>
 </p1510:revInfo>
 </file>
 
 <file path=ppt/changesInfos/changesInfo1.xml><?xml version="1.0" encoding="utf-8"?>
 <pc:chgInfo xmlns:a="http://schemas.openxmlformats.org/drawingml/2006/main" xmlns:r="http://schemas.openxmlformats.org/officeDocument/2006/relationships" xmlns:ac="http://schemas.microsoft.com/office/drawing/2013/main/command" xmlns:pc="http://schemas.microsoft.com/office/powerpoint/2013/main/command">
+  <pc:docChgLst>
+    <pc:chgData name="Subir Parida" userId="5adae42a5ff17c16" providerId="LiveId" clId="{E7F114A3-2290-493E-A215-0EC9B9C80270}"/>
+    <pc:docChg chg="custSel modSld">
+      <pc:chgData name="Subir Parida" userId="5adae42a5ff17c16" providerId="LiveId" clId="{E7F114A3-2290-493E-A215-0EC9B9C80270}" dt="2024-02-03T20:37:38.282" v="236" actId="1036"/>
+      <pc:docMkLst>
+        <pc:docMk/>
+      </pc:docMkLst>
+      <pc:sldChg chg="addSp delSp modSp mod">
+        <pc:chgData name="Subir Parida" userId="5adae42a5ff17c16" providerId="LiveId" clId="{E7F114A3-2290-493E-A215-0EC9B9C80270}" dt="2024-02-03T20:32:37.939" v="54" actId="1076"/>
+        <pc:sldMkLst>
+          <pc:docMk/>
+          <pc:sldMk cId="2219232480" sldId="333"/>
+        </pc:sldMkLst>
+        <pc:picChg chg="add mod">
+          <ac:chgData name="Subir Parida" userId="5adae42a5ff17c16" providerId="LiveId" clId="{E7F114A3-2290-493E-A215-0EC9B9C80270}" dt="2024-02-03T20:32:10.327" v="51" actId="12789"/>
+          <ac:picMkLst>
+            <pc:docMk/>
+            <pc:sldMk cId="2219232480" sldId="333"/>
+            <ac:picMk id="3" creationId="{C822C99A-812D-7C11-3E4D-2030080DBE18}"/>
+          </ac:picMkLst>
+        </pc:picChg>
+        <pc:picChg chg="del">
+          <ac:chgData name="Subir Parida" userId="5adae42a5ff17c16" providerId="LiveId" clId="{E7F114A3-2290-493E-A215-0EC9B9C80270}" dt="2024-02-03T20:31:54.141" v="45" actId="478"/>
+          <ac:picMkLst>
+            <pc:docMk/>
+            <pc:sldMk cId="2219232480" sldId="333"/>
+            <ac:picMk id="5" creationId="{00000000-0000-0000-0000-000000000000}"/>
+          </ac:picMkLst>
+        </pc:picChg>
+        <pc:picChg chg="del">
+          <ac:chgData name="Subir Parida" userId="5adae42a5ff17c16" providerId="LiveId" clId="{E7F114A3-2290-493E-A215-0EC9B9C80270}" dt="2024-02-03T20:31:54.141" v="45" actId="478"/>
+          <ac:picMkLst>
+            <pc:docMk/>
+            <pc:sldMk cId="2219232480" sldId="333"/>
+            <ac:picMk id="6" creationId="{00000000-0000-0000-0000-000000000000}"/>
+          </ac:picMkLst>
+        </pc:picChg>
+        <pc:picChg chg="del">
+          <ac:chgData name="Subir Parida" userId="5adae42a5ff17c16" providerId="LiveId" clId="{E7F114A3-2290-493E-A215-0EC9B9C80270}" dt="2024-02-03T20:31:54.141" v="45" actId="478"/>
+          <ac:picMkLst>
+            <pc:docMk/>
+            <pc:sldMk cId="2219232480" sldId="333"/>
+            <ac:picMk id="7" creationId="{00000000-0000-0000-0000-000000000000}"/>
+          </ac:picMkLst>
+        </pc:picChg>
+        <pc:picChg chg="add mod">
+          <ac:chgData name="Subir Parida" userId="5adae42a5ff17c16" providerId="LiveId" clId="{E7F114A3-2290-493E-A215-0EC9B9C80270}" dt="2024-02-03T20:32:14.575" v="52" actId="408"/>
+          <ac:picMkLst>
+            <pc:docMk/>
+            <pc:sldMk cId="2219232480" sldId="333"/>
+            <ac:picMk id="10" creationId="{5BECDEF1-92CE-1772-F331-521BA963D5F2}"/>
+          </ac:picMkLst>
+        </pc:picChg>
+        <pc:picChg chg="add mod">
+          <ac:chgData name="Subir Parida" userId="5adae42a5ff17c16" providerId="LiveId" clId="{E7F114A3-2290-493E-A215-0EC9B9C80270}" dt="2024-02-03T20:32:10.327" v="51" actId="12789"/>
+          <ac:picMkLst>
+            <pc:docMk/>
+            <pc:sldMk cId="2219232480" sldId="333"/>
+            <ac:picMk id="12" creationId="{C51CA399-B059-37CE-E979-7955C5F70E27}"/>
+          </ac:picMkLst>
+        </pc:picChg>
+        <pc:picChg chg="add mod">
+          <ac:chgData name="Subir Parida" userId="5adae42a5ff17c16" providerId="LiveId" clId="{E7F114A3-2290-493E-A215-0EC9B9C80270}" dt="2024-02-03T20:32:37.939" v="54" actId="1076"/>
+          <ac:picMkLst>
+            <pc:docMk/>
+            <pc:sldMk cId="2219232480" sldId="333"/>
+            <ac:picMk id="14" creationId="{E3233F92-6E75-9200-DAE3-8C6B1E339485}"/>
+          </ac:picMkLst>
+        </pc:picChg>
+      </pc:sldChg>
+      <pc:sldChg chg="addSp delSp modSp mod">
+        <pc:chgData name="Subir Parida" userId="5adae42a5ff17c16" providerId="LiveId" clId="{E7F114A3-2290-493E-A215-0EC9B9C80270}" dt="2024-02-03T20:37:38.282" v="236" actId="1036"/>
+        <pc:sldMkLst>
+          <pc:docMk/>
+          <pc:sldMk cId="2355974788" sldId="334"/>
+        </pc:sldMkLst>
+        <pc:picChg chg="del">
+          <ac:chgData name="Subir Parida" userId="5adae42a5ff17c16" providerId="LiveId" clId="{E7F114A3-2290-493E-A215-0EC9B9C80270}" dt="2024-02-03T20:34:18.209" v="98" actId="478"/>
+          <ac:picMkLst>
+            <pc:docMk/>
+            <pc:sldMk cId="2355974788" sldId="334"/>
+            <ac:picMk id="2" creationId="{00000000-0000-0000-0000-000000000000}"/>
+          </ac:picMkLst>
+        </pc:picChg>
+        <pc:picChg chg="del">
+          <ac:chgData name="Subir Parida" userId="5adae42a5ff17c16" providerId="LiveId" clId="{E7F114A3-2290-493E-A215-0EC9B9C80270}" dt="2024-02-03T20:34:18.209" v="98" actId="478"/>
+          <ac:picMkLst>
+            <pc:docMk/>
+            <pc:sldMk cId="2355974788" sldId="334"/>
+            <ac:picMk id="3" creationId="{00000000-0000-0000-0000-000000000000}"/>
+          </ac:picMkLst>
+        </pc:picChg>
+        <pc:picChg chg="add mod ord">
+          <ac:chgData name="Subir Parida" userId="5adae42a5ff17c16" providerId="LiveId" clId="{E7F114A3-2290-493E-A215-0EC9B9C80270}" dt="2024-02-03T20:34:33.201" v="147" actId="166"/>
+          <ac:picMkLst>
+            <pc:docMk/>
+            <pc:sldMk cId="2355974788" sldId="334"/>
+            <ac:picMk id="5" creationId="{648529E2-799D-CF0B-FB59-94743DDD4CC6}"/>
+          </ac:picMkLst>
+        </pc:picChg>
+        <pc:picChg chg="add mod">
+          <ac:chgData name="Subir Parida" userId="5adae42a5ff17c16" providerId="LiveId" clId="{E7F114A3-2290-493E-A215-0EC9B9C80270}" dt="2024-02-03T20:37:38.282" v="236" actId="1036"/>
+          <ac:picMkLst>
+            <pc:docMk/>
+            <pc:sldMk cId="2355974788" sldId="334"/>
+            <ac:picMk id="7" creationId="{6AE1CF72-531A-3C97-5D1E-FDE53581E49A}"/>
+          </ac:picMkLst>
+        </pc:picChg>
+        <pc:picChg chg="del">
+          <ac:chgData name="Subir Parida" userId="5adae42a5ff17c16" providerId="LiveId" clId="{E7F114A3-2290-493E-A215-0EC9B9C80270}" dt="2024-02-03T20:34:18.209" v="98" actId="478"/>
+          <ac:picMkLst>
+            <pc:docMk/>
+            <pc:sldMk cId="2355974788" sldId="334"/>
+            <ac:picMk id="10" creationId="{00000000-0000-0000-0000-000000000000}"/>
+          </ac:picMkLst>
+        </pc:picChg>
+        <pc:picChg chg="add mod">
+          <ac:chgData name="Subir Parida" userId="5adae42a5ff17c16" providerId="LiveId" clId="{E7F114A3-2290-493E-A215-0EC9B9C80270}" dt="2024-02-03T20:37:38.282" v="236" actId="1036"/>
+          <ac:picMkLst>
+            <pc:docMk/>
+            <pc:sldMk cId="2355974788" sldId="334"/>
+            <ac:picMk id="11" creationId="{54E614DC-D379-5426-EB32-969325D46BFA}"/>
+          </ac:picMkLst>
+        </pc:picChg>
+        <pc:picChg chg="add mod">
+          <ac:chgData name="Subir Parida" userId="5adae42a5ff17c16" providerId="LiveId" clId="{E7F114A3-2290-493E-A215-0EC9B9C80270}" dt="2024-02-03T20:37:38.282" v="236" actId="1036"/>
+          <ac:picMkLst>
+            <pc:docMk/>
+            <pc:sldMk cId="2355974788" sldId="334"/>
+            <ac:picMk id="13" creationId="{7D7DDF41-BB9E-66F0-E3B4-98AA6CD63B18}"/>
+          </ac:picMkLst>
+        </pc:picChg>
+      </pc:sldChg>
+      <pc:sldChg chg="addSp delSp modSp mod">
+        <pc:chgData name="Subir Parida" userId="5adae42a5ff17c16" providerId="LiveId" clId="{E7F114A3-2290-493E-A215-0EC9B9C80270}" dt="2024-02-03T20:37:27.237" v="230" actId="1035"/>
+        <pc:sldMkLst>
+          <pc:docMk/>
+          <pc:sldMk cId="4150459399" sldId="335"/>
+        </pc:sldMkLst>
+        <pc:spChg chg="mod">
+          <ac:chgData name="Subir Parida" userId="5adae42a5ff17c16" providerId="LiveId" clId="{E7F114A3-2290-493E-A215-0EC9B9C80270}" dt="2024-02-03T20:35:59.790" v="170" actId="20577"/>
+          <ac:spMkLst>
+            <pc:docMk/>
+            <pc:sldMk cId="4150459399" sldId="335"/>
+            <ac:spMk id="4" creationId="{00000000-0000-0000-0000-000000000000}"/>
+          </ac:spMkLst>
+        </pc:spChg>
+        <pc:picChg chg="add mod ord">
+          <ac:chgData name="Subir Parida" userId="5adae42a5ff17c16" providerId="LiveId" clId="{E7F114A3-2290-493E-A215-0EC9B9C80270}" dt="2024-02-03T20:36:58.804" v="213" actId="166"/>
+          <ac:picMkLst>
+            <pc:docMk/>
+            <pc:sldMk cId="4150459399" sldId="335"/>
+            <ac:picMk id="2" creationId="{D0F07CF6-7824-0017-3C36-229B754AE4BF}"/>
+          </ac:picMkLst>
+        </pc:picChg>
+        <pc:picChg chg="del">
+          <ac:chgData name="Subir Parida" userId="5adae42a5ff17c16" providerId="LiveId" clId="{E7F114A3-2290-493E-A215-0EC9B9C80270}" dt="2024-02-03T20:36:52.568" v="211" actId="478"/>
+          <ac:picMkLst>
+            <pc:docMk/>
+            <pc:sldMk cId="4150459399" sldId="335"/>
+            <ac:picMk id="5" creationId="{00000000-0000-0000-0000-000000000000}"/>
+          </ac:picMkLst>
+        </pc:picChg>
+        <pc:picChg chg="del">
+          <ac:chgData name="Subir Parida" userId="5adae42a5ff17c16" providerId="LiveId" clId="{E7F114A3-2290-493E-A215-0EC9B9C80270}" dt="2024-02-03T20:36:52.568" v="211" actId="478"/>
+          <ac:picMkLst>
+            <pc:docMk/>
+            <pc:sldMk cId="4150459399" sldId="335"/>
+            <ac:picMk id="6" creationId="{00000000-0000-0000-0000-000000000000}"/>
+          </ac:picMkLst>
+        </pc:picChg>
+        <pc:picChg chg="del">
+          <ac:chgData name="Subir Parida" userId="5adae42a5ff17c16" providerId="LiveId" clId="{E7F114A3-2290-493E-A215-0EC9B9C80270}" dt="2024-02-03T20:36:52.568" v="211" actId="478"/>
+          <ac:picMkLst>
+            <pc:docMk/>
+            <pc:sldMk cId="4150459399" sldId="335"/>
+            <ac:picMk id="7" creationId="{00000000-0000-0000-0000-000000000000}"/>
+          </ac:picMkLst>
+        </pc:picChg>
+        <pc:picChg chg="add mod">
+          <ac:chgData name="Subir Parida" userId="5adae42a5ff17c16" providerId="LiveId" clId="{E7F114A3-2290-493E-A215-0EC9B9C80270}" dt="2024-02-03T20:37:27.237" v="230" actId="1035"/>
+          <ac:picMkLst>
+            <pc:docMk/>
+            <pc:sldMk cId="4150459399" sldId="335"/>
+            <ac:picMk id="9" creationId="{71AD63BB-CC93-FBF6-8B73-4A5DC677B9BC}"/>
+          </ac:picMkLst>
+        </pc:picChg>
+        <pc:picChg chg="add mod">
+          <ac:chgData name="Subir Parida" userId="5adae42a5ff17c16" providerId="LiveId" clId="{E7F114A3-2290-493E-A215-0EC9B9C80270}" dt="2024-02-03T20:37:27.237" v="230" actId="1035"/>
+          <ac:picMkLst>
+            <pc:docMk/>
+            <pc:sldMk cId="4150459399" sldId="335"/>
+            <ac:picMk id="11" creationId="{50747B9D-22DB-C623-9FF0-2D2717AF8C4C}"/>
+          </ac:picMkLst>
+        </pc:picChg>
+        <pc:picChg chg="add mod">
+          <ac:chgData name="Subir Parida" userId="5adae42a5ff17c16" providerId="LiveId" clId="{E7F114A3-2290-493E-A215-0EC9B9C80270}" dt="2024-02-03T20:37:27.237" v="230" actId="1035"/>
+          <ac:picMkLst>
+            <pc:docMk/>
+            <pc:sldMk cId="4150459399" sldId="335"/>
+            <ac:picMk id="13" creationId="{677CCE72-E24D-003D-3EBE-23715F9C05EC}"/>
+          </ac:picMkLst>
+        </pc:picChg>
+      </pc:sldChg>
+    </pc:docChg>
+  </pc:docChgLst>
   <pc:docChgLst>
     <pc:chgData name="Subir Parida" userId="5adae42a5ff17c16" providerId="LiveId" clId="{840E3A22-11DA-4C6F-9B3F-EF20193E732C}"/>
     <pc:docChg chg="undo custSel addSld delSld modSld sldOrd">
@@ -7338,6 +7545,132 @@
             <ac:graphicFrameMk id="14" creationId="{43A5E035-C63C-7486-0D29-4CEB542771DD}"/>
           </ac:graphicFrameMkLst>
         </pc:graphicFrameChg>
+      </pc:sldChg>
+    </pc:docChg>
+  </pc:docChgLst>
+  <pc:docChgLst>
+    <pc:chgData name="Subir Parida" userId="5adae42a5ff17c16" providerId="LiveId" clId="{01589B5E-0D6D-47FC-8B6E-F734D00DB5F1}"/>
+    <pc:docChg chg="undo custSel modSld">
+      <pc:chgData name="Subir Parida" userId="5adae42a5ff17c16" providerId="LiveId" clId="{01589B5E-0D6D-47FC-8B6E-F734D00DB5F1}" dt="2024-02-04T16:49:31.101" v="167" actId="108"/>
+      <pc:docMkLst>
+        <pc:docMk/>
+      </pc:docMkLst>
+      <pc:sldChg chg="modSp mod">
+        <pc:chgData name="Subir Parida" userId="5adae42a5ff17c16" providerId="LiveId" clId="{01589B5E-0D6D-47FC-8B6E-F734D00DB5F1}" dt="2024-02-04T16:49:03.582" v="163" actId="20577"/>
+        <pc:sldMkLst>
+          <pc:docMk/>
+          <pc:sldMk cId="2219232480" sldId="333"/>
+        </pc:sldMkLst>
+        <pc:spChg chg="mod">
+          <ac:chgData name="Subir Parida" userId="5adae42a5ff17c16" providerId="LiveId" clId="{01589B5E-0D6D-47FC-8B6E-F734D00DB5F1}" dt="2024-02-04T16:49:03.582" v="163" actId="20577"/>
+          <ac:spMkLst>
+            <pc:docMk/>
+            <pc:sldMk cId="2219232480" sldId="333"/>
+            <ac:spMk id="8" creationId="{00000000-0000-0000-0000-000000000000}"/>
+          </ac:spMkLst>
+        </pc:spChg>
+      </pc:sldChg>
+      <pc:sldChg chg="modSp mod">
+        <pc:chgData name="Subir Parida" userId="5adae42a5ff17c16" providerId="LiveId" clId="{01589B5E-0D6D-47FC-8B6E-F734D00DB5F1}" dt="2024-02-04T16:49:21.014" v="166" actId="20577"/>
+        <pc:sldMkLst>
+          <pc:docMk/>
+          <pc:sldMk cId="2355974788" sldId="334"/>
+        </pc:sldMkLst>
+        <pc:spChg chg="mod">
+          <ac:chgData name="Subir Parida" userId="5adae42a5ff17c16" providerId="LiveId" clId="{01589B5E-0D6D-47FC-8B6E-F734D00DB5F1}" dt="2024-02-04T16:49:21.014" v="166" actId="20577"/>
+          <ac:spMkLst>
+            <pc:docMk/>
+            <pc:sldMk cId="2355974788" sldId="334"/>
+            <ac:spMk id="8" creationId="{00000000-0000-0000-0000-000000000000}"/>
+          </ac:spMkLst>
+        </pc:spChg>
+      </pc:sldChg>
+      <pc:sldChg chg="addSp delSp modSp mod">
+        <pc:chgData name="Subir Parida" userId="5adae42a5ff17c16" providerId="LiveId" clId="{01589B5E-0D6D-47FC-8B6E-F734D00DB5F1}" dt="2024-02-04T16:49:31.101" v="167" actId="108"/>
+        <pc:sldMkLst>
+          <pc:docMk/>
+          <pc:sldMk cId="4150459399" sldId="335"/>
+        </pc:sldMkLst>
+        <pc:spChg chg="mod">
+          <ac:chgData name="Subir Parida" userId="5adae42a5ff17c16" providerId="LiveId" clId="{01589B5E-0D6D-47FC-8B6E-F734D00DB5F1}" dt="2024-02-04T16:49:31.101" v="167" actId="108"/>
+          <ac:spMkLst>
+            <pc:docMk/>
+            <pc:sldMk cId="4150459399" sldId="335"/>
+            <ac:spMk id="8" creationId="{00000000-0000-0000-0000-000000000000}"/>
+          </ac:spMkLst>
+        </pc:spChg>
+        <pc:picChg chg="ord">
+          <ac:chgData name="Subir Parida" userId="5adae42a5ff17c16" providerId="LiveId" clId="{01589B5E-0D6D-47FC-8B6E-F734D00DB5F1}" dt="2024-02-04T16:43:34.054" v="124" actId="166"/>
+          <ac:picMkLst>
+            <pc:docMk/>
+            <pc:sldMk cId="4150459399" sldId="335"/>
+            <ac:picMk id="2" creationId="{D0F07CF6-7824-0017-3C36-229B754AE4BF}"/>
+          </ac:picMkLst>
+        </pc:picChg>
+        <pc:picChg chg="add mod">
+          <ac:chgData name="Subir Parida" userId="5adae42a5ff17c16" providerId="LiveId" clId="{01589B5E-0D6D-47FC-8B6E-F734D00DB5F1}" dt="2024-02-04T16:43:41.472" v="138" actId="1035"/>
+          <ac:picMkLst>
+            <pc:docMk/>
+            <pc:sldMk cId="4150459399" sldId="335"/>
+            <ac:picMk id="5" creationId="{CABDE279-CE5F-FE07-7C1F-BDD4BF9496F0}"/>
+          </ac:picMkLst>
+        </pc:picChg>
+        <pc:picChg chg="add mod">
+          <ac:chgData name="Subir Parida" userId="5adae42a5ff17c16" providerId="LiveId" clId="{01589B5E-0D6D-47FC-8B6E-F734D00DB5F1}" dt="2024-02-04T16:43:41.472" v="138" actId="1035"/>
+          <ac:picMkLst>
+            <pc:docMk/>
+            <pc:sldMk cId="4150459399" sldId="335"/>
+            <ac:picMk id="7" creationId="{67DF2862-65CF-4D9B-CA08-51CFF666DC83}"/>
+          </ac:picMkLst>
+        </pc:picChg>
+        <pc:picChg chg="del">
+          <ac:chgData name="Subir Parida" userId="5adae42a5ff17c16" providerId="LiveId" clId="{01589B5E-0D6D-47FC-8B6E-F734D00DB5F1}" dt="2024-02-04T16:43:21.384" v="58" actId="478"/>
+          <ac:picMkLst>
+            <pc:docMk/>
+            <pc:sldMk cId="4150459399" sldId="335"/>
+            <ac:picMk id="9" creationId="{71AD63BB-CC93-FBF6-8B73-4A5DC677B9BC}"/>
+          </ac:picMkLst>
+        </pc:picChg>
+        <pc:picChg chg="del">
+          <ac:chgData name="Subir Parida" userId="5adae42a5ff17c16" providerId="LiveId" clId="{01589B5E-0D6D-47FC-8B6E-F734D00DB5F1}" dt="2024-02-04T16:43:21.384" v="58" actId="478"/>
+          <ac:picMkLst>
+            <pc:docMk/>
+            <pc:sldMk cId="4150459399" sldId="335"/>
+            <ac:picMk id="11" creationId="{50747B9D-22DB-C623-9FF0-2D2717AF8C4C}"/>
+          </ac:picMkLst>
+        </pc:picChg>
+        <pc:picChg chg="add mod">
+          <ac:chgData name="Subir Parida" userId="5adae42a5ff17c16" providerId="LiveId" clId="{01589B5E-0D6D-47FC-8B6E-F734D00DB5F1}" dt="2024-02-04T16:43:41.472" v="138" actId="1035"/>
+          <ac:picMkLst>
+            <pc:docMk/>
+            <pc:sldMk cId="4150459399" sldId="335"/>
+            <ac:picMk id="12" creationId="{1C3A89E1-D16D-D0ED-DF6E-00D591CFE4E2}"/>
+          </ac:picMkLst>
+        </pc:picChg>
+        <pc:picChg chg="del">
+          <ac:chgData name="Subir Parida" userId="5adae42a5ff17c16" providerId="LiveId" clId="{01589B5E-0D6D-47FC-8B6E-F734D00DB5F1}" dt="2024-02-04T16:43:21.384" v="58" actId="478"/>
+          <ac:picMkLst>
+            <pc:docMk/>
+            <pc:sldMk cId="4150459399" sldId="335"/>
+            <ac:picMk id="13" creationId="{677CCE72-E24D-003D-3EBE-23715F9C05EC}"/>
+          </ac:picMkLst>
+        </pc:picChg>
+        <pc:picChg chg="add mod">
+          <ac:chgData name="Subir Parida" userId="5adae42a5ff17c16" providerId="LiveId" clId="{01589B5E-0D6D-47FC-8B6E-F734D00DB5F1}" dt="2024-02-04T16:42:56.079" v="54" actId="571"/>
+          <ac:picMkLst>
+            <pc:docMk/>
+            <pc:sldMk cId="4150459399" sldId="335"/>
+            <ac:picMk id="14" creationId="{3FA1D3FC-9F32-764C-3030-CDC465A9F5A1}"/>
+          </ac:picMkLst>
+        </pc:picChg>
+        <pc:picChg chg="add mod">
+          <ac:chgData name="Subir Parida" userId="5adae42a5ff17c16" providerId="LiveId" clId="{01589B5E-0D6D-47FC-8B6E-F734D00DB5F1}" dt="2024-02-04T16:42:56.079" v="54" actId="571"/>
+          <ac:picMkLst>
+            <pc:docMk/>
+            <pc:sldMk cId="4150459399" sldId="335"/>
+            <ac:picMk id="15" creationId="{D582FA3C-68CD-B0B1-0F52-F7AA9161D268}"/>
+          </ac:picMkLst>
+        </pc:picChg>
       </pc:sldChg>
     </pc:docChg>
   </pc:docChgLst>
@@ -7774,7 +8107,6 @@
     </c:plotArea>
     <c:plotVisOnly val="1"/>
     <c:dispBlanksAs val="gap"/>
-    <c:showDLblsOverMax val="0"/>
     <c:extLst>
       <c:ext xmlns:c16r3="http://schemas.microsoft.com/office/drawing/2017/03/chart" uri="{56B9EC1D-385E-4148-901F-78D8002777C0}">
         <c16r3:dataDisplayOptions16>
@@ -7782,6 +8114,7 @@
         </c16r3:dataDisplayOptions16>
       </c:ext>
     </c:extLst>
+    <c:showDLblsOverMax val="0"/>
   </c:chart>
   <c:spPr>
     <a:noFill/>
@@ -8251,7 +8584,6 @@
     </c:plotArea>
     <c:plotVisOnly val="1"/>
     <c:dispBlanksAs val="gap"/>
-    <c:showDLblsOverMax val="0"/>
     <c:extLst>
       <c:ext xmlns:c16r3="http://schemas.microsoft.com/office/drawing/2017/03/chart" uri="{56B9EC1D-385E-4148-901F-78D8002777C0}">
         <c16r3:dataDisplayOptions16>
@@ -8259,6 +8591,7 @@
         </c16r3:dataDisplayOptions16>
       </c:ext>
     </c:extLst>
+    <c:showDLblsOverMax val="0"/>
   </c:chart>
   <c:spPr>
     <a:noFill/>
@@ -8728,7 +9061,6 @@
     </c:plotArea>
     <c:plotVisOnly val="1"/>
     <c:dispBlanksAs val="gap"/>
-    <c:showDLblsOverMax val="0"/>
     <c:extLst>
       <c:ext xmlns:c16r3="http://schemas.microsoft.com/office/drawing/2017/03/chart" uri="{56B9EC1D-385E-4148-901F-78D8002777C0}">
         <c16r3:dataDisplayOptions16>
@@ -8736,6 +9068,7 @@
         </c16r3:dataDisplayOptions16>
       </c:ext>
     </c:extLst>
+    <c:showDLblsOverMax val="0"/>
   </c:chart>
   <c:spPr>
     <a:noFill/>
@@ -9213,7 +9546,6 @@
     </c:plotArea>
     <c:plotVisOnly val="1"/>
     <c:dispBlanksAs val="gap"/>
-    <c:showDLblsOverMax val="0"/>
     <c:extLst>
       <c:ext xmlns:c16r3="http://schemas.microsoft.com/office/drawing/2017/03/chart" uri="{56B9EC1D-385E-4148-901F-78D8002777C0}">
         <c16r3:dataDisplayOptions16>
@@ -9221,6 +9553,7 @@
         </c16r3:dataDisplayOptions16>
       </c:ext>
     </c:extLst>
+    <c:showDLblsOverMax val="0"/>
   </c:chart>
   <c:spPr>
     <a:noFill/>
@@ -9698,7 +10031,6 @@
     </c:plotArea>
     <c:plotVisOnly val="1"/>
     <c:dispBlanksAs val="gap"/>
-    <c:showDLblsOverMax val="0"/>
     <c:extLst>
       <c:ext xmlns:c16r3="http://schemas.microsoft.com/office/drawing/2017/03/chart" uri="{56B9EC1D-385E-4148-901F-78D8002777C0}">
         <c16r3:dataDisplayOptions16>
@@ -9706,6 +10038,7 @@
         </c16r3:dataDisplayOptions16>
       </c:ext>
     </c:extLst>
+    <c:showDLblsOverMax val="0"/>
   </c:chart>
   <c:spPr>
     <a:noFill/>
@@ -10183,7 +10516,6 @@
     </c:plotArea>
     <c:plotVisOnly val="1"/>
     <c:dispBlanksAs val="gap"/>
-    <c:showDLblsOverMax val="0"/>
     <c:extLst>
       <c:ext xmlns:c16r3="http://schemas.microsoft.com/office/drawing/2017/03/chart" uri="{56B9EC1D-385E-4148-901F-78D8002777C0}">
         <c16r3:dataDisplayOptions16>
@@ -10191,6 +10523,7 @@
         </c16r3:dataDisplayOptions16>
       </c:ext>
     </c:extLst>
+    <c:showDLblsOverMax val="0"/>
   </c:chart>
   <c:spPr>
     <a:noFill/>
@@ -10661,7 +10994,6 @@
     </c:plotArea>
     <c:plotVisOnly val="1"/>
     <c:dispBlanksAs val="gap"/>
-    <c:showDLblsOverMax val="0"/>
     <c:extLst>
       <c:ext xmlns:c16r3="http://schemas.microsoft.com/office/drawing/2017/03/chart" uri="{56B9EC1D-385E-4148-901F-78D8002777C0}">
         <c16r3:dataDisplayOptions16>
@@ -10669,6 +11001,7 @@
         </c16r3:dataDisplayOptions16>
       </c:ext>
     </c:extLst>
+    <c:showDLblsOverMax val="0"/>
   </c:chart>
   <c:spPr>
     <a:noFill/>
@@ -11138,7 +11471,6 @@
     </c:plotArea>
     <c:plotVisOnly val="1"/>
     <c:dispBlanksAs val="gap"/>
-    <c:showDLblsOverMax val="0"/>
     <c:extLst>
       <c:ext xmlns:c16r3="http://schemas.microsoft.com/office/drawing/2017/03/chart" uri="{56B9EC1D-385E-4148-901F-78D8002777C0}">
         <c16r3:dataDisplayOptions16>
@@ -11146,6 +11478,7 @@
         </c16r3:dataDisplayOptions16>
       </c:ext>
     </c:extLst>
+    <c:showDLblsOverMax val="0"/>
   </c:chart>
   <c:spPr>
     <a:noFill/>
@@ -11624,7 +11957,6 @@
     </c:plotArea>
     <c:plotVisOnly val="1"/>
     <c:dispBlanksAs val="gap"/>
-    <c:showDLblsOverMax val="0"/>
     <c:extLst>
       <c:ext xmlns:c16r3="http://schemas.microsoft.com/office/drawing/2017/03/chart" uri="{56B9EC1D-385E-4148-901F-78D8002777C0}">
         <c16r3:dataDisplayOptions16>
@@ -11632,6 +11964,7 @@
         </c16r3:dataDisplayOptions16>
       </c:ext>
     </c:extLst>
+    <c:showDLblsOverMax val="0"/>
   </c:chart>
   <c:spPr>
     <a:noFill/>
@@ -12109,7 +12442,6 @@
     </c:plotArea>
     <c:plotVisOnly val="1"/>
     <c:dispBlanksAs val="gap"/>
-    <c:showDLblsOverMax val="0"/>
     <c:extLst>
       <c:ext xmlns:c16r3="http://schemas.microsoft.com/office/drawing/2017/03/chart" uri="{56B9EC1D-385E-4148-901F-78D8002777C0}">
         <c16r3:dataDisplayOptions16>
@@ -12117,6 +12449,7 @@
         </c16r3:dataDisplayOptions16>
       </c:ext>
     </c:extLst>
+    <c:showDLblsOverMax val="0"/>
   </c:chart>
   <c:spPr>
     <a:noFill/>
@@ -12586,7 +12919,6 @@
     </c:plotArea>
     <c:plotVisOnly val="1"/>
     <c:dispBlanksAs val="gap"/>
-    <c:showDLblsOverMax val="0"/>
     <c:extLst>
       <c:ext xmlns:c16r3="http://schemas.microsoft.com/office/drawing/2017/03/chart" uri="{56B9EC1D-385E-4148-901F-78D8002777C0}">
         <c16r3:dataDisplayOptions16>
@@ -12594,6 +12926,7 @@
         </c16r3:dataDisplayOptions16>
       </c:ext>
     </c:extLst>
+    <c:showDLblsOverMax val="0"/>
   </c:chart>
   <c:spPr>
     <a:noFill/>
@@ -13063,7 +13396,6 @@
     </c:plotArea>
     <c:plotVisOnly val="1"/>
     <c:dispBlanksAs val="gap"/>
-    <c:showDLblsOverMax val="0"/>
     <c:extLst>
       <c:ext xmlns:c16r3="http://schemas.microsoft.com/office/drawing/2017/03/chart" uri="{56B9EC1D-385E-4148-901F-78D8002777C0}">
         <c16r3:dataDisplayOptions16>
@@ -13071,6 +13403,7 @@
         </c16r3:dataDisplayOptions16>
       </c:ext>
     </c:extLst>
+    <c:showDLblsOverMax val="0"/>
   </c:chart>
   <c:spPr>
     <a:noFill/>
@@ -13540,7 +13873,6 @@
     </c:plotArea>
     <c:plotVisOnly val="1"/>
     <c:dispBlanksAs val="gap"/>
-    <c:showDLblsOverMax val="0"/>
     <c:extLst>
       <c:ext xmlns:c16r3="http://schemas.microsoft.com/office/drawing/2017/03/chart" uri="{56B9EC1D-385E-4148-901F-78D8002777C0}">
         <c16r3:dataDisplayOptions16>
@@ -13548,6 +13880,7 @@
         </c16r3:dataDisplayOptions16>
       </c:ext>
     </c:extLst>
+    <c:showDLblsOverMax val="0"/>
   </c:chart>
   <c:spPr>
     <a:noFill/>
@@ -14025,7 +14358,6 @@
     </c:plotArea>
     <c:plotVisOnly val="1"/>
     <c:dispBlanksAs val="gap"/>
-    <c:showDLblsOverMax val="0"/>
     <c:extLst>
       <c:ext xmlns:c16r3="http://schemas.microsoft.com/office/drawing/2017/03/chart" uri="{56B9EC1D-385E-4148-901F-78D8002777C0}">
         <c16r3:dataDisplayOptions16>
@@ -14033,6 +14365,7 @@
         </c16r3:dataDisplayOptions16>
       </c:ext>
     </c:extLst>
+    <c:showDLblsOverMax val="0"/>
   </c:chart>
   <c:spPr>
     <a:noFill/>
@@ -14510,7 +14843,6 @@
     </c:plotArea>
     <c:plotVisOnly val="1"/>
     <c:dispBlanksAs val="gap"/>
-    <c:showDLblsOverMax val="0"/>
     <c:extLst>
       <c:ext xmlns:c16r3="http://schemas.microsoft.com/office/drawing/2017/03/chart" uri="{56B9EC1D-385E-4148-901F-78D8002777C0}">
         <c16r3:dataDisplayOptions16>
@@ -14518,6 +14850,7 @@
         </c16r3:dataDisplayOptions16>
       </c:ext>
     </c:extLst>
+    <c:showDLblsOverMax val="0"/>
   </c:chart>
   <c:spPr>
     <a:noFill/>
@@ -14995,7 +15328,6 @@
     </c:plotArea>
     <c:plotVisOnly val="1"/>
     <c:dispBlanksAs val="gap"/>
-    <c:showDLblsOverMax val="0"/>
     <c:extLst>
       <c:ext xmlns:c16r3="http://schemas.microsoft.com/office/drawing/2017/03/chart" uri="{56B9EC1D-385E-4148-901F-78D8002777C0}">
         <c16r3:dataDisplayOptions16>
@@ -15003,6 +15335,7 @@
         </c16r3:dataDisplayOptions16>
       </c:ext>
     </c:extLst>
+    <c:showDLblsOverMax val="0"/>
   </c:chart>
   <c:spPr>
     <a:noFill/>
@@ -15480,7 +15813,6 @@
     </c:plotArea>
     <c:plotVisOnly val="1"/>
     <c:dispBlanksAs val="gap"/>
-    <c:showDLblsOverMax val="0"/>
     <c:extLst>
       <c:ext xmlns:c16r3="http://schemas.microsoft.com/office/drawing/2017/03/chart" uri="{56B9EC1D-385E-4148-901F-78D8002777C0}">
         <c16r3:dataDisplayOptions16>
@@ -15488,6 +15820,7 @@
         </c16r3:dataDisplayOptions16>
       </c:ext>
     </c:extLst>
+    <c:showDLblsOverMax val="0"/>
   </c:chart>
   <c:spPr>
     <a:noFill/>
@@ -15957,7 +16290,6 @@
     </c:plotArea>
     <c:plotVisOnly val="1"/>
     <c:dispBlanksAs val="gap"/>
-    <c:showDLblsOverMax val="0"/>
     <c:extLst>
       <c:ext xmlns:c16r3="http://schemas.microsoft.com/office/drawing/2017/03/chart" uri="{56B9EC1D-385E-4148-901F-78D8002777C0}">
         <c16r3:dataDisplayOptions16>
@@ -15965,6 +16297,7 @@
         </c16r3:dataDisplayOptions16>
       </c:ext>
     </c:extLst>
+    <c:showDLblsOverMax val="0"/>
   </c:chart>
   <c:spPr>
     <a:noFill/>
@@ -25873,7 +26206,7 @@
           <a:p>
             <a:fld id="{FE9DB346-41A7-4E73-A0DA-000F1C5CB949}" type="datetimeFigureOut">
               <a:rPr lang="en-US" smtClean="0"/>
-              <a:t>2/2/2024</a:t>
+              <a:t>2/4/2024</a:t>
             </a:fld>
             <a:endParaRPr lang="en-US"/>
           </a:p>
@@ -26041,7 +26374,7 @@
           <a:p>
             <a:fld id="{FE9DB346-41A7-4E73-A0DA-000F1C5CB949}" type="datetimeFigureOut">
               <a:rPr lang="en-US" smtClean="0"/>
-              <a:t>2/2/2024</a:t>
+              <a:t>2/4/2024</a:t>
             </a:fld>
             <a:endParaRPr lang="en-US"/>
           </a:p>
@@ -26219,7 +26552,7 @@
           <a:p>
             <a:fld id="{FE9DB346-41A7-4E73-A0DA-000F1C5CB949}" type="datetimeFigureOut">
               <a:rPr lang="en-US" smtClean="0"/>
-              <a:t>2/2/2024</a:t>
+              <a:t>2/4/2024</a:t>
             </a:fld>
             <a:endParaRPr lang="en-US"/>
           </a:p>
@@ -26387,7 +26720,7 @@
           <a:p>
             <a:fld id="{FE9DB346-41A7-4E73-A0DA-000F1C5CB949}" type="datetimeFigureOut">
               <a:rPr lang="en-US" smtClean="0"/>
-              <a:t>2/2/2024</a:t>
+              <a:t>2/4/2024</a:t>
             </a:fld>
             <a:endParaRPr lang="en-US"/>
           </a:p>
@@ -26632,7 +26965,7 @@
           <a:p>
             <a:fld id="{FE9DB346-41A7-4E73-A0DA-000F1C5CB949}" type="datetimeFigureOut">
               <a:rPr lang="en-US" smtClean="0"/>
-              <a:t>2/2/2024</a:t>
+              <a:t>2/4/2024</a:t>
             </a:fld>
             <a:endParaRPr lang="en-US"/>
           </a:p>
@@ -26861,7 +27194,7 @@
           <a:p>
             <a:fld id="{FE9DB346-41A7-4E73-A0DA-000F1C5CB949}" type="datetimeFigureOut">
               <a:rPr lang="en-US" smtClean="0"/>
-              <a:t>2/2/2024</a:t>
+              <a:t>2/4/2024</a:t>
             </a:fld>
             <a:endParaRPr lang="en-US"/>
           </a:p>
@@ -27225,7 +27558,7 @@
           <a:p>
             <a:fld id="{FE9DB346-41A7-4E73-A0DA-000F1C5CB949}" type="datetimeFigureOut">
               <a:rPr lang="en-US" smtClean="0"/>
-              <a:t>2/2/2024</a:t>
+              <a:t>2/4/2024</a:t>
             </a:fld>
             <a:endParaRPr lang="en-US"/>
           </a:p>
@@ -27342,7 +27675,7 @@
           <a:p>
             <a:fld id="{FE9DB346-41A7-4E73-A0DA-000F1C5CB949}" type="datetimeFigureOut">
               <a:rPr lang="en-US" smtClean="0"/>
-              <a:t>2/2/2024</a:t>
+              <a:t>2/4/2024</a:t>
             </a:fld>
             <a:endParaRPr lang="en-US"/>
           </a:p>
@@ -27437,7 +27770,7 @@
           <a:p>
             <a:fld id="{FE9DB346-41A7-4E73-A0DA-000F1C5CB949}" type="datetimeFigureOut">
               <a:rPr lang="en-US" smtClean="0"/>
-              <a:t>2/2/2024</a:t>
+              <a:t>2/4/2024</a:t>
             </a:fld>
             <a:endParaRPr lang="en-US"/>
           </a:p>
@@ -27712,7 +28045,7 @@
           <a:p>
             <a:fld id="{FE9DB346-41A7-4E73-A0DA-000F1C5CB949}" type="datetimeFigureOut">
               <a:rPr lang="en-US" smtClean="0"/>
-              <a:t>2/2/2024</a:t>
+              <a:t>2/4/2024</a:t>
             </a:fld>
             <a:endParaRPr lang="en-US"/>
           </a:p>
@@ -27964,7 +28297,7 @@
           <a:p>
             <a:fld id="{FE9DB346-41A7-4E73-A0DA-000F1C5CB949}" type="datetimeFigureOut">
               <a:rPr lang="en-US" smtClean="0"/>
-              <a:t>2/2/2024</a:t>
+              <a:t>2/4/2024</a:t>
             </a:fld>
             <a:endParaRPr lang="en-US"/>
           </a:p>
@@ -28175,7 +28508,7 @@
           <a:p>
             <a:fld id="{FE9DB346-41A7-4E73-A0DA-000F1C5CB949}" type="datetimeFigureOut">
               <a:rPr lang="en-US" smtClean="0"/>
-              <a:t>2/2/2024</a:t>
+              <a:t>2/4/2024</a:t>
             </a:fld>
             <a:endParaRPr lang="en-US"/>
           </a:p>
@@ -30425,9 +30758,194 @@
           </a:p>
         </p:txBody>
       </p:sp>
+      <p:sp>
+        <p:nvSpPr>
+          <p:cNvPr id="8" name="TextBox 7"/>
+          <p:cNvSpPr txBox="1"/>
+          <p:nvPr/>
+        </p:nvSpPr>
+        <p:spPr>
+          <a:xfrm>
+            <a:off x="583472" y="3526491"/>
+            <a:ext cx="11019247" cy="3139321"/>
+          </a:xfrm>
+          <a:prstGeom prst="rect">
+            <a:avLst/>
+          </a:prstGeom>
+          <a:noFill/>
+        </p:spPr>
+        <p:txBody>
+          <a:bodyPr wrap="square" numCol="2" rtlCol="0">
+            <a:spAutoFit/>
+          </a:bodyPr>
+          <a:lstStyle/>
+          <a:p>
+            <a:pPr marL="285750" indent="-144000" algn="just">
+              <a:spcBef>
+                <a:spcPts val="600"/>
+              </a:spcBef>
+              <a:spcAft>
+                <a:spcPts val="600"/>
+              </a:spcAft>
+              <a:buFont typeface="Arial" panose="020B0604020202020204" pitchFamily="34" charset="0"/>
+              <a:buChar char="•"/>
+            </a:pPr>
+            <a:r>
+              <a:rPr lang="en-IN" dirty="0" err="1"/>
+              <a:t>CelebA</a:t>
+            </a:r>
+            <a:r>
+              <a:rPr lang="en-IN" dirty="0"/>
+              <a:t>-HQ training dataset have white faces, females, and younger age group biases</a:t>
+            </a:r>
+          </a:p>
+          <a:p>
+            <a:pPr marL="285750" indent="-144000" algn="just">
+              <a:spcBef>
+                <a:spcPts val="600"/>
+              </a:spcBef>
+              <a:spcAft>
+                <a:spcPts val="600"/>
+              </a:spcAft>
+              <a:buFont typeface="Arial" panose="020B0604020202020204" pitchFamily="34" charset="0"/>
+              <a:buChar char="•"/>
+            </a:pPr>
+            <a:r>
+              <a:rPr lang="en-IN" dirty="0"/>
+              <a:t>Training data has 83% White faces which is maintained in DDGAN and more generated in DDPM and Stable Diffusion</a:t>
+            </a:r>
+          </a:p>
+          <a:p>
+            <a:pPr marL="285750" indent="-144000" algn="just">
+              <a:spcBef>
+                <a:spcPts val="600"/>
+              </a:spcBef>
+              <a:spcAft>
+                <a:spcPts val="600"/>
+              </a:spcAft>
+              <a:buFont typeface="Arial" panose="020B0604020202020204" pitchFamily="34" charset="0"/>
+              <a:buChar char="•"/>
+            </a:pPr>
+            <a:r>
+              <a:rPr lang="en-IN" dirty="0"/>
+              <a:t>Asian, Indian, and black facial images are less generated by DDPM and Stable Diffusion models</a:t>
+            </a:r>
+          </a:p>
+          <a:p>
+            <a:pPr marL="285750" indent="-144000" algn="just">
+              <a:spcBef>
+                <a:spcPts val="600"/>
+              </a:spcBef>
+              <a:spcAft>
+                <a:spcPts val="600"/>
+              </a:spcAft>
+              <a:buFont typeface="Arial" panose="020B0604020202020204" pitchFamily="34" charset="0"/>
+              <a:buChar char="•"/>
+            </a:pPr>
+            <a:r>
+              <a:rPr lang="en-IN" dirty="0"/>
+              <a:t>Training data has 2/3</a:t>
+            </a:r>
+            <a:r>
+              <a:rPr lang="en-IN" baseline="30000" dirty="0"/>
+              <a:t>rd</a:t>
+            </a:r>
+            <a:r>
+              <a:rPr lang="en-IN" dirty="0"/>
+              <a:t> proportion of female facial images, which is maintained in DDGAN and Stable Diffusion models</a:t>
+            </a:r>
+          </a:p>
+          <a:p>
+            <a:pPr marL="285750" indent="-144000" algn="just">
+              <a:spcBef>
+                <a:spcPts val="600"/>
+              </a:spcBef>
+              <a:spcAft>
+                <a:spcPts val="600"/>
+              </a:spcAft>
+              <a:buFont typeface="Arial" panose="020B0604020202020204" pitchFamily="34" charset="0"/>
+              <a:buChar char="•"/>
+            </a:pPr>
+            <a:r>
+              <a:rPr lang="en-IN" dirty="0"/>
+              <a:t>DDPM tends to generate more females</a:t>
+            </a:r>
+          </a:p>
+          <a:p>
+            <a:pPr marL="285750" indent="-144000" algn="just">
+              <a:spcBef>
+                <a:spcPts val="600"/>
+              </a:spcBef>
+              <a:spcAft>
+                <a:spcPts val="600"/>
+              </a:spcAft>
+              <a:buFont typeface="Arial" panose="020B0604020202020204" pitchFamily="34" charset="0"/>
+              <a:buChar char="•"/>
+            </a:pPr>
+            <a:r>
+              <a:rPr lang="en-IN" dirty="0"/>
+              <a:t>Training data has 2/3</a:t>
+            </a:r>
+            <a:r>
+              <a:rPr lang="en-IN" baseline="30000" dirty="0"/>
+              <a:t>rd</a:t>
+            </a:r>
+            <a:r>
+              <a:rPr lang="en-IN" dirty="0"/>
+              <a:t> proportion of young faces, which is almost maintained in DDGAN and Stable Diffusion models</a:t>
+            </a:r>
+          </a:p>
+          <a:p>
+            <a:pPr marL="285750" indent="-144000" algn="just">
+              <a:spcBef>
+                <a:spcPts val="600"/>
+              </a:spcBef>
+              <a:spcAft>
+                <a:spcPts val="600"/>
+              </a:spcAft>
+              <a:buFont typeface="Arial" panose="020B0604020202020204" pitchFamily="34" charset="0"/>
+              <a:buChar char="•"/>
+            </a:pPr>
+            <a:r>
+              <a:rPr lang="en-IN" dirty="0"/>
+              <a:t>DDPM tends to generate more young faces</a:t>
+            </a:r>
+          </a:p>
+          <a:p>
+            <a:pPr marL="285750" indent="-144000" algn="just">
+              <a:spcBef>
+                <a:spcPts val="600"/>
+              </a:spcBef>
+              <a:spcAft>
+                <a:spcPts val="600"/>
+              </a:spcAft>
+              <a:buFont typeface="Arial" panose="020B0604020202020204" pitchFamily="34" charset="0"/>
+              <a:buChar char="•"/>
+            </a:pPr>
+            <a:r>
+              <a:rPr lang="en-IN" dirty="0"/>
+              <a:t>Diffusion models trained on </a:t>
+            </a:r>
+            <a:r>
+              <a:rPr lang="en-IN" dirty="0" err="1"/>
+              <a:t>CelebA</a:t>
+            </a:r>
+            <a:r>
+              <a:rPr lang="en-IN" dirty="0"/>
+              <a:t>-HQ faces are biased to generate young white female facial images</a:t>
+            </a:r>
+          </a:p>
+        </p:txBody>
+      </p:sp>
       <p:pic>
         <p:nvPicPr>
-          <p:cNvPr id="5" name="Picture 4"/>
+          <p:cNvPr id="3" name="Picture 2">
+            <a:extLst>
+              <a:ext uri="{FF2B5EF4-FFF2-40B4-BE49-F238E27FC236}">
+                <a16:creationId xmlns:a16="http://schemas.microsoft.com/office/drawing/2014/main" id="{C822C99A-812D-7C11-3E4D-2030080DBE18}"/>
+              </a:ext>
+            </a:extLst>
+          </p:cNvPr>
           <p:cNvPicPr>
             <a:picLocks noChangeAspect="1"/>
           </p:cNvPicPr>
@@ -30447,8 +30965,8 @@
         </p:blipFill>
         <p:spPr>
           <a:xfrm>
-            <a:off x="7265992" y="611855"/>
-            <a:ext cx="4857730" cy="2914637"/>
+            <a:off x="7722150" y="990107"/>
+            <a:ext cx="4140000" cy="2484000"/>
           </a:xfrm>
           <a:prstGeom prst="rect">
             <a:avLst/>
@@ -30457,7 +30975,13 @@
       </p:pic>
       <p:pic>
         <p:nvPicPr>
-          <p:cNvPr id="6" name="Picture 5"/>
+          <p:cNvPr id="10" name="Picture 9">
+            <a:extLst>
+              <a:ext uri="{FF2B5EF4-FFF2-40B4-BE49-F238E27FC236}">
+                <a16:creationId xmlns:a16="http://schemas.microsoft.com/office/drawing/2014/main" id="{5BECDEF1-92CE-1772-F331-521BA963D5F2}"/>
+              </a:ext>
+            </a:extLst>
+          </p:cNvPr>
           <p:cNvPicPr>
             <a:picLocks noChangeAspect="1"/>
           </p:cNvPicPr>
@@ -30477,8 +31001,8 @@
         </p:blipFill>
         <p:spPr>
           <a:xfrm>
-            <a:off x="3749924" y="854741"/>
-            <a:ext cx="3886183" cy="2428864"/>
+            <a:off x="3957481" y="994607"/>
+            <a:ext cx="3960000" cy="2475000"/>
           </a:xfrm>
           <a:prstGeom prst="rect">
             <a:avLst/>
@@ -30487,7 +31011,13 @@
       </p:pic>
       <p:pic>
         <p:nvPicPr>
-          <p:cNvPr id="7" name="Picture 6"/>
+          <p:cNvPr id="12" name="Picture 11">
+            <a:extLst>
+              <a:ext uri="{FF2B5EF4-FFF2-40B4-BE49-F238E27FC236}">
+                <a16:creationId xmlns:a16="http://schemas.microsoft.com/office/drawing/2014/main" id="{C51CA399-B059-37CE-E979-7955C5F70E27}"/>
+              </a:ext>
+            </a:extLst>
+          </p:cNvPr>
           <p:cNvPicPr>
             <a:picLocks noChangeAspect="1"/>
           </p:cNvPicPr>
@@ -30507,166 +31037,50 @@
         </p:blipFill>
         <p:spPr>
           <a:xfrm>
-            <a:off x="213358" y="854741"/>
-            <a:ext cx="3886183" cy="2428864"/>
+            <a:off x="192812" y="994607"/>
+            <a:ext cx="3960000" cy="2475000"/>
           </a:xfrm>
           <a:prstGeom prst="rect">
             <a:avLst/>
           </a:prstGeom>
         </p:spPr>
       </p:pic>
-      <p:sp>
-        <p:nvSpPr>
-          <p:cNvPr id="8" name="TextBox 7"/>
-          <p:cNvSpPr txBox="1"/>
+      <p:pic>
+        <p:nvPicPr>
+          <p:cNvPr id="14" name="Picture 13">
+            <a:extLst>
+              <a:ext uri="{FF2B5EF4-FFF2-40B4-BE49-F238E27FC236}">
+                <a16:creationId xmlns:a16="http://schemas.microsoft.com/office/drawing/2014/main" id="{E3233F92-6E75-9200-DAE3-8C6B1E339485}"/>
+              </a:ext>
+            </a:extLst>
+          </p:cNvPr>
+          <p:cNvPicPr>
+            <a:picLocks noChangeAspect="1"/>
+          </p:cNvPicPr>
           <p:nvPr/>
-        </p:nvSpPr>
+        </p:nvPicPr>
+        <p:blipFill>
+          <a:blip r:embed="rId5">
+            <a:extLst>
+              <a:ext uri="{28A0092B-C50C-407E-A947-70E740481C1C}">
+                <a14:useLocalDpi xmlns:a14="http://schemas.microsoft.com/office/drawing/2010/main" val="0"/>
+              </a:ext>
+            </a:extLst>
+          </a:blip>
+          <a:stretch>
+            <a:fillRect/>
+          </a:stretch>
+        </p:blipFill>
         <p:spPr>
           <a:xfrm>
-            <a:off x="583473" y="3526491"/>
-            <a:ext cx="10857414" cy="2800767"/>
+            <a:off x="10337410" y="451495"/>
+            <a:ext cx="1149409" cy="806491"/>
           </a:xfrm>
           <a:prstGeom prst="rect">
             <a:avLst/>
           </a:prstGeom>
-          <a:noFill/>
         </p:spPr>
-        <p:txBody>
-          <a:bodyPr wrap="square" rtlCol="0">
-            <a:spAutoFit/>
-          </a:bodyPr>
-          <a:lstStyle/>
-          <a:p>
-            <a:pPr marL="285750" indent="-285750" algn="just">
-              <a:buFont typeface="Arial" panose="020B0604020202020204" pitchFamily="34" charset="0"/>
-              <a:buChar char="•"/>
-            </a:pPr>
-            <a:r>
-              <a:rPr lang="en-IN" sz="1600" dirty="0" err="1"/>
-              <a:t>CelebA</a:t>
-            </a:r>
-            <a:r>
-              <a:rPr lang="en-IN" sz="1600" dirty="0"/>
-              <a:t>-HQ training dataset have white faces, females, and younger age group biases</a:t>
-            </a:r>
-          </a:p>
-          <a:p>
-            <a:pPr marL="285750" indent="-285750" algn="just">
-              <a:buFont typeface="Arial" panose="020B0604020202020204" pitchFamily="34" charset="0"/>
-              <a:buChar char="•"/>
-            </a:pPr>
-            <a:endParaRPr lang="en-IN" sz="1600" dirty="0"/>
-          </a:p>
-          <a:p>
-            <a:pPr marL="285750" indent="-285750" algn="just">
-              <a:buFont typeface="Arial" panose="020B0604020202020204" pitchFamily="34" charset="0"/>
-              <a:buChar char="•"/>
-            </a:pPr>
-            <a:r>
-              <a:rPr lang="en-IN" sz="1600" dirty="0"/>
-              <a:t>Training data has 83% White faces which is maintained in DDGAN and more generated in DDPM and Stable Diffusion</a:t>
-            </a:r>
-          </a:p>
-          <a:p>
-            <a:pPr marL="285750" indent="-285750" algn="just">
-              <a:buFont typeface="Arial" panose="020B0604020202020204" pitchFamily="34" charset="0"/>
-              <a:buChar char="•"/>
-            </a:pPr>
-            <a:r>
-              <a:rPr lang="en-IN" sz="1600" dirty="0"/>
-              <a:t>Asian, Indian, and black facial images are less generated by DDPM and Stable Diffusion models</a:t>
-            </a:r>
-          </a:p>
-          <a:p>
-            <a:pPr marL="285750" indent="-285750" algn="just">
-              <a:buFont typeface="Arial" panose="020B0604020202020204" pitchFamily="34" charset="0"/>
-              <a:buChar char="•"/>
-            </a:pPr>
-            <a:endParaRPr lang="en-IN" sz="1600" dirty="0"/>
-          </a:p>
-          <a:p>
-            <a:pPr marL="285750" indent="-285750" algn="just">
-              <a:buFont typeface="Arial" panose="020B0604020202020204" pitchFamily="34" charset="0"/>
-              <a:buChar char="•"/>
-            </a:pPr>
-            <a:r>
-              <a:rPr lang="en-IN" sz="1600" dirty="0"/>
-              <a:t>Training data has 2/3</a:t>
-            </a:r>
-            <a:r>
-              <a:rPr lang="en-IN" sz="1600" baseline="30000" dirty="0"/>
-              <a:t>rd</a:t>
-            </a:r>
-            <a:r>
-              <a:rPr lang="en-IN" sz="1600" dirty="0"/>
-              <a:t> proportion of female facial images, which is maintained in DDGAN and Stable Diffusion models</a:t>
-            </a:r>
-          </a:p>
-          <a:p>
-            <a:pPr marL="285750" indent="-285750" algn="just">
-              <a:buFont typeface="Arial" panose="020B0604020202020204" pitchFamily="34" charset="0"/>
-              <a:buChar char="•"/>
-            </a:pPr>
-            <a:r>
-              <a:rPr lang="en-IN" sz="1600" dirty="0"/>
-              <a:t>DDPM tends to generate more females</a:t>
-            </a:r>
-          </a:p>
-          <a:p>
-            <a:pPr marL="285750" indent="-285750" algn="just">
-              <a:buFont typeface="Arial" panose="020B0604020202020204" pitchFamily="34" charset="0"/>
-              <a:buChar char="•"/>
-            </a:pPr>
-            <a:endParaRPr lang="en-IN" sz="1600" dirty="0"/>
-          </a:p>
-          <a:p>
-            <a:pPr marL="285750" indent="-285750" algn="just">
-              <a:buFont typeface="Arial" panose="020B0604020202020204" pitchFamily="34" charset="0"/>
-              <a:buChar char="•"/>
-            </a:pPr>
-            <a:r>
-              <a:rPr lang="en-IN" sz="1600" dirty="0"/>
-              <a:t>Training data has 2/3</a:t>
-            </a:r>
-            <a:r>
-              <a:rPr lang="en-IN" sz="1600" baseline="30000" dirty="0"/>
-              <a:t>rd</a:t>
-            </a:r>
-            <a:r>
-              <a:rPr lang="en-IN" sz="1600" dirty="0"/>
-              <a:t> proportion of young faces, which is almost maintained in DDGAN and Stable Diffusion models</a:t>
-            </a:r>
-          </a:p>
-          <a:p>
-            <a:pPr marL="285750" indent="-285750" algn="just">
-              <a:buFont typeface="Arial" panose="020B0604020202020204" pitchFamily="34" charset="0"/>
-              <a:buChar char="•"/>
-            </a:pPr>
-            <a:r>
-              <a:rPr lang="en-IN" sz="1600" dirty="0"/>
-              <a:t>DDPM tends to generate more young faces</a:t>
-            </a:r>
-          </a:p>
-          <a:p>
-            <a:pPr marL="285750" indent="-285750" algn="just">
-              <a:buFont typeface="Arial" panose="020B0604020202020204" pitchFamily="34" charset="0"/>
-              <a:buChar char="•"/>
-            </a:pPr>
-            <a:r>
-              <a:rPr lang="en-IN" sz="1600" dirty="0"/>
-              <a:t>Diffusion models trained on </a:t>
-            </a:r>
-            <a:r>
-              <a:rPr lang="en-IN" sz="1600" dirty="0" err="1"/>
-              <a:t>CelebA</a:t>
-            </a:r>
-            <a:r>
-              <a:rPr lang="en-IN" sz="1600" dirty="0"/>
-              <a:t>-HQ faces are biased to generate young white female facial images</a:t>
-            </a:r>
-          </a:p>
-        </p:txBody>
-      </p:sp>
+      </p:pic>
     </p:spTree>
     <p:extLst>
       <p:ext uri="{BB962C8B-B14F-4D97-AF65-F5344CB8AC3E}">
@@ -31551,21 +31965,31 @@
           <a:noFill/>
         </p:spPr>
         <p:txBody>
-          <a:bodyPr wrap="square" rtlCol="0">
+          <a:bodyPr wrap="square" numCol="2" rtlCol="0">
             <a:spAutoFit/>
           </a:bodyPr>
-          <a:lstStyle/>
-          <a:p>
-            <a:pPr marL="285750" indent="-285750" algn="just">
+          <a:lstStyle>
+            <a:defPPr>
+              <a:defRPr lang="en-US"/>
+            </a:defPPr>
+            <a:lvl1pPr marL="285750" indent="-144000" algn="just">
+              <a:spcBef>
+                <a:spcPts val="600"/>
+              </a:spcBef>
+              <a:spcAft>
+                <a:spcPts val="600"/>
+              </a:spcAft>
               <a:buFont typeface="Arial" panose="020B0604020202020204" pitchFamily="34" charset="0"/>
               <a:buChar char="•"/>
-            </a:pPr>
+            </a:lvl1pPr>
+          </a:lstStyle>
+          <a:p>
             <a:r>
-              <a:rPr lang="en-IN" sz="1600" dirty="0" err="1"/>
+              <a:rPr lang="en-IN" dirty="0" err="1"/>
               <a:t>Fairface</a:t>
             </a:r>
             <a:r>
-              <a:rPr lang="en-IN" sz="1600" dirty="0"/>
+              <a:rPr lang="en-IN" dirty="0"/>
               <a:t> training dataset is almost balanced in race and gender, but depict younger age group biases</a:t>
             </a:r>
           </a:p>
@@ -31573,7 +31997,13 @@
       </p:sp>
       <p:pic>
         <p:nvPicPr>
-          <p:cNvPr id="2" name="Picture 1"/>
+          <p:cNvPr id="7" name="Picture 6">
+            <a:extLst>
+              <a:ext uri="{FF2B5EF4-FFF2-40B4-BE49-F238E27FC236}">
+                <a16:creationId xmlns:a16="http://schemas.microsoft.com/office/drawing/2014/main" id="{6AE1CF72-531A-3C97-5D1E-FDE53581E49A}"/>
+              </a:ext>
+            </a:extLst>
+          </p:cNvPr>
           <p:cNvPicPr>
             <a:picLocks noChangeAspect="1"/>
           </p:cNvPicPr>
@@ -31593,8 +32023,8 @@
         </p:blipFill>
         <p:spPr>
           <a:xfrm>
-            <a:off x="7327463" y="611854"/>
-            <a:ext cx="4857728" cy="2914637"/>
+            <a:off x="7733924" y="981600"/>
+            <a:ext cx="4140000" cy="2484000"/>
           </a:xfrm>
           <a:prstGeom prst="rect">
             <a:avLst/>
@@ -31603,7 +32033,13 @@
       </p:pic>
       <p:pic>
         <p:nvPicPr>
-          <p:cNvPr id="3" name="Picture 2"/>
+          <p:cNvPr id="11" name="Picture 10">
+            <a:extLst>
+              <a:ext uri="{FF2B5EF4-FFF2-40B4-BE49-F238E27FC236}">
+                <a16:creationId xmlns:a16="http://schemas.microsoft.com/office/drawing/2014/main" id="{54E614DC-D379-5426-EB32-969325D46BFA}"/>
+              </a:ext>
+            </a:extLst>
+          </p:cNvPr>
           <p:cNvPicPr>
             <a:picLocks noChangeAspect="1"/>
           </p:cNvPicPr>
@@ -31623,8 +32059,8 @@
         </p:blipFill>
         <p:spPr>
           <a:xfrm>
-            <a:off x="3739675" y="876190"/>
-            <a:ext cx="3886183" cy="2428864"/>
+            <a:off x="3972622" y="986100"/>
+            <a:ext cx="3960000" cy="2475000"/>
           </a:xfrm>
           <a:prstGeom prst="rect">
             <a:avLst/>
@@ -31633,7 +32069,13 @@
       </p:pic>
       <p:pic>
         <p:nvPicPr>
-          <p:cNvPr id="10" name="Picture 9"/>
+          <p:cNvPr id="13" name="Picture 12">
+            <a:extLst>
+              <a:ext uri="{FF2B5EF4-FFF2-40B4-BE49-F238E27FC236}">
+                <a16:creationId xmlns:a16="http://schemas.microsoft.com/office/drawing/2014/main" id="{7D7DDF41-BB9E-66F0-E3B4-98AA6CD63B18}"/>
+              </a:ext>
+            </a:extLst>
+          </p:cNvPr>
           <p:cNvPicPr>
             <a:picLocks noChangeAspect="1"/>
           </p:cNvPicPr>
@@ -31653,8 +32095,44 @@
         </p:blipFill>
         <p:spPr>
           <a:xfrm>
-            <a:off x="213357" y="872305"/>
-            <a:ext cx="3886183" cy="2428864"/>
+            <a:off x="211321" y="986100"/>
+            <a:ext cx="3960000" cy="2475000"/>
+          </a:xfrm>
+          <a:prstGeom prst="rect">
+            <a:avLst/>
+          </a:prstGeom>
+        </p:spPr>
+      </p:pic>
+      <p:pic>
+        <p:nvPicPr>
+          <p:cNvPr id="5" name="Picture 4">
+            <a:extLst>
+              <a:ext uri="{FF2B5EF4-FFF2-40B4-BE49-F238E27FC236}">
+                <a16:creationId xmlns:a16="http://schemas.microsoft.com/office/drawing/2014/main" id="{648529E2-799D-CF0B-FB59-94743DDD4CC6}"/>
+              </a:ext>
+            </a:extLst>
+          </p:cNvPr>
+          <p:cNvPicPr>
+            <a:picLocks noChangeAspect="1"/>
+          </p:cNvPicPr>
+          <p:nvPr/>
+        </p:nvPicPr>
+        <p:blipFill>
+          <a:blip r:embed="rId5">
+            <a:extLst>
+              <a:ext uri="{28A0092B-C50C-407E-A947-70E740481C1C}">
+                <a14:useLocalDpi xmlns:a14="http://schemas.microsoft.com/office/drawing/2010/main" val="0"/>
+              </a:ext>
+            </a:extLst>
+          </a:blip>
+          <a:stretch>
+            <a:fillRect/>
+          </a:stretch>
+        </p:blipFill>
+        <p:spPr>
+          <a:xfrm>
+            <a:off x="10337410" y="451495"/>
+            <a:ext cx="1149409" cy="806491"/>
           </a:xfrm>
           <a:prstGeom prst="rect">
             <a:avLst/>
@@ -32510,7 +32988,7 @@
                   </a:schemeClr>
                 </a:solidFill>
               </a:rPr>
-              <a:t>-Sub (Race + Gender balanced) dataset</a:t>
+              <a:t>-Sub (R + G balanced) dataset</a:t>
             </a:r>
           </a:p>
         </p:txBody>
@@ -32532,17 +33010,27 @@
           <a:noFill/>
         </p:spPr>
         <p:txBody>
-          <a:bodyPr wrap="square" rtlCol="0">
+          <a:bodyPr wrap="square" numCol="2" rtlCol="0">
             <a:spAutoFit/>
           </a:bodyPr>
-          <a:lstStyle/>
-          <a:p>
-            <a:pPr marL="285750" indent="-285750" algn="just">
+          <a:lstStyle>
+            <a:defPPr>
+              <a:defRPr lang="en-US"/>
+            </a:defPPr>
+            <a:lvl1pPr marL="285750" indent="-144000" algn="just">
+              <a:spcBef>
+                <a:spcPts val="600"/>
+              </a:spcBef>
+              <a:spcAft>
+                <a:spcPts val="600"/>
+              </a:spcAft>
               <a:buFont typeface="Arial" panose="020B0604020202020204" pitchFamily="34" charset="0"/>
               <a:buChar char="•"/>
-            </a:pPr>
+            </a:lvl1pPr>
+          </a:lstStyle>
+          <a:p>
             <a:r>
-              <a:rPr lang="en-IN" sz="1600" dirty="0"/>
+              <a:rPr lang="en-IN" dirty="0"/>
               <a:t>x</a:t>
             </a:r>
           </a:p>
@@ -32550,7 +33038,13 @@
       </p:sp>
       <p:pic>
         <p:nvPicPr>
-          <p:cNvPr id="5" name="Picture 4"/>
+          <p:cNvPr id="5" name="Picture 4">
+            <a:extLst>
+              <a:ext uri="{FF2B5EF4-FFF2-40B4-BE49-F238E27FC236}">
+                <a16:creationId xmlns:a16="http://schemas.microsoft.com/office/drawing/2014/main" id="{CABDE279-CE5F-FE07-7C1F-BDD4BF9496F0}"/>
+              </a:ext>
+            </a:extLst>
+          </p:cNvPr>
           <p:cNvPicPr>
             <a:picLocks noChangeAspect="1"/>
           </p:cNvPicPr>
@@ -32570,8 +33064,8 @@
         </p:blipFill>
         <p:spPr>
           <a:xfrm>
-            <a:off x="7279841" y="886813"/>
-            <a:ext cx="4912159" cy="2947295"/>
+            <a:off x="7738064" y="985412"/>
+            <a:ext cx="4140000" cy="2484000"/>
           </a:xfrm>
           <a:prstGeom prst="rect">
             <a:avLst/>
@@ -32580,7 +33074,13 @@
       </p:pic>
       <p:pic>
         <p:nvPicPr>
-          <p:cNvPr id="6" name="Picture 5"/>
+          <p:cNvPr id="7" name="Picture 6">
+            <a:extLst>
+              <a:ext uri="{FF2B5EF4-FFF2-40B4-BE49-F238E27FC236}">
+                <a16:creationId xmlns:a16="http://schemas.microsoft.com/office/drawing/2014/main" id="{67DF2862-65CF-4D9B-CA08-51CFF666DC83}"/>
+              </a:ext>
+            </a:extLst>
+          </p:cNvPr>
           <p:cNvPicPr>
             <a:picLocks noChangeAspect="1"/>
           </p:cNvPicPr>
@@ -32600,8 +33100,8 @@
         </p:blipFill>
         <p:spPr>
           <a:xfrm>
-            <a:off x="3712629" y="1194429"/>
-            <a:ext cx="3929727" cy="2456079"/>
+            <a:off x="3971957" y="989912"/>
+            <a:ext cx="3960000" cy="2475000"/>
           </a:xfrm>
           <a:prstGeom prst="rect">
             <a:avLst/>
@@ -32610,7 +33110,13 @@
       </p:pic>
       <p:pic>
         <p:nvPicPr>
-          <p:cNvPr id="7" name="Picture 6"/>
+          <p:cNvPr id="12" name="Picture 11">
+            <a:extLst>
+              <a:ext uri="{FF2B5EF4-FFF2-40B4-BE49-F238E27FC236}">
+                <a16:creationId xmlns:a16="http://schemas.microsoft.com/office/drawing/2014/main" id="{1C3A89E1-D16D-D0ED-DF6E-00D591CFE4E2}"/>
+              </a:ext>
+            </a:extLst>
+          </p:cNvPr>
           <p:cNvPicPr>
             <a:picLocks noChangeAspect="1"/>
           </p:cNvPicPr>
@@ -32630,8 +33136,44 @@
         </p:blipFill>
         <p:spPr>
           <a:xfrm>
-            <a:off x="191584" y="1214643"/>
-            <a:ext cx="3929727" cy="2456079"/>
+            <a:off x="205849" y="989912"/>
+            <a:ext cx="3960000" cy="2475000"/>
+          </a:xfrm>
+          <a:prstGeom prst="rect">
+            <a:avLst/>
+          </a:prstGeom>
+        </p:spPr>
+      </p:pic>
+      <p:pic>
+        <p:nvPicPr>
+          <p:cNvPr id="2" name="Picture 1">
+            <a:extLst>
+              <a:ext uri="{FF2B5EF4-FFF2-40B4-BE49-F238E27FC236}">
+                <a16:creationId xmlns:a16="http://schemas.microsoft.com/office/drawing/2014/main" id="{D0F07CF6-7824-0017-3C36-229B754AE4BF}"/>
+              </a:ext>
+            </a:extLst>
+          </p:cNvPr>
+          <p:cNvPicPr>
+            <a:picLocks noChangeAspect="1"/>
+          </p:cNvPicPr>
+          <p:nvPr/>
+        </p:nvPicPr>
+        <p:blipFill>
+          <a:blip r:embed="rId5">
+            <a:extLst>
+              <a:ext uri="{28A0092B-C50C-407E-A947-70E740481C1C}">
+                <a14:useLocalDpi xmlns:a14="http://schemas.microsoft.com/office/drawing/2010/main" val="0"/>
+              </a:ext>
+            </a:extLst>
+          </a:blip>
+          <a:stretch>
+            <a:fillRect/>
+          </a:stretch>
+        </p:blipFill>
+        <p:spPr>
+          <a:xfrm>
+            <a:off x="10337410" y="451495"/>
+            <a:ext cx="1149409" cy="806491"/>
           </a:xfrm>
           <a:prstGeom prst="rect">
             <a:avLst/>

--- a/Bias_Diffusion_v5.pptx
+++ b/Bias_Diffusion_v5.pptx
@@ -141,7 +141,7 @@
 <p1510:revInfo xmlns:a="http://schemas.openxmlformats.org/drawingml/2006/main" xmlns:r="http://schemas.openxmlformats.org/officeDocument/2006/relationships" xmlns:p1510="http://schemas.microsoft.com/office/powerpoint/2015/10/main">
   <p1510:revLst>
     <p1510:client id="{01589B5E-0D6D-47FC-8B6E-F734D00DB5F1}" v="3" dt="2024-02-04T16:42:56.079"/>
-    <p1510:client id="{E7F114A3-2290-493E-A215-0EC9B9C80270}" v="6" dt="2024-02-03T20:36:16.293"/>
+    <p1510:client id="{E7F114A3-2290-493E-A215-0EC9B9C80270}" v="7" dt="2024-02-05T16:30:16.418"/>
   </p1510:revLst>
 </p1510:revInfo>
 </file>
@@ -151,7 +151,7 @@
   <pc:docChgLst>
     <pc:chgData name="Subir Parida" userId="5adae42a5ff17c16" providerId="LiveId" clId="{E7F114A3-2290-493E-A215-0EC9B9C80270}"/>
     <pc:docChg chg="custSel modSld">
-      <pc:chgData name="Subir Parida" userId="5adae42a5ff17c16" providerId="LiveId" clId="{E7F114A3-2290-493E-A215-0EC9B9C80270}" dt="2024-02-03T20:37:38.282" v="236" actId="1036"/>
+      <pc:chgData name="Subir Parida" userId="5adae42a5ff17c16" providerId="LiveId" clId="{E7F114A3-2290-493E-A215-0EC9B9C80270}" dt="2024-02-05T16:31:39.014" v="341" actId="166"/>
       <pc:docMkLst>
         <pc:docMk/>
       </pc:docMkLst>
@@ -219,7 +219,7 @@
         </pc:picChg>
       </pc:sldChg>
       <pc:sldChg chg="addSp delSp modSp mod">
-        <pc:chgData name="Subir Parida" userId="5adae42a5ff17c16" providerId="LiveId" clId="{E7F114A3-2290-493E-A215-0EC9B9C80270}" dt="2024-02-03T20:37:38.282" v="236" actId="1036"/>
+        <pc:chgData name="Subir Parida" userId="5adae42a5ff17c16" providerId="LiveId" clId="{E7F114A3-2290-493E-A215-0EC9B9C80270}" dt="2024-02-05T16:31:39.014" v="341" actId="166"/>
         <pc:sldMkLst>
           <pc:docMk/>
           <pc:sldMk cId="2355974788" sldId="334"/>
@@ -240,20 +240,36 @@
             <ac:picMk id="3" creationId="{00000000-0000-0000-0000-000000000000}"/>
           </ac:picMkLst>
         </pc:picChg>
+        <pc:picChg chg="add mod">
+          <ac:chgData name="Subir Parida" userId="5adae42a5ff17c16" providerId="LiveId" clId="{E7F114A3-2290-493E-A215-0EC9B9C80270}" dt="2024-02-05T16:31:35.194" v="340" actId="1035"/>
+          <ac:picMkLst>
+            <pc:docMk/>
+            <pc:sldMk cId="2355974788" sldId="334"/>
+            <ac:picMk id="3" creationId="{659B19E9-060C-762A-5F2F-783F84DB5F4D}"/>
+          </ac:picMkLst>
+        </pc:picChg>
         <pc:picChg chg="add mod ord">
-          <ac:chgData name="Subir Parida" userId="5adae42a5ff17c16" providerId="LiveId" clId="{E7F114A3-2290-493E-A215-0EC9B9C80270}" dt="2024-02-03T20:34:33.201" v="147" actId="166"/>
+          <ac:chgData name="Subir Parida" userId="5adae42a5ff17c16" providerId="LiveId" clId="{E7F114A3-2290-493E-A215-0EC9B9C80270}" dt="2024-02-05T16:31:39.014" v="341" actId="166"/>
           <ac:picMkLst>
             <pc:docMk/>
             <pc:sldMk cId="2355974788" sldId="334"/>
             <ac:picMk id="5" creationId="{648529E2-799D-CF0B-FB59-94743DDD4CC6}"/>
           </ac:picMkLst>
         </pc:picChg>
-        <pc:picChg chg="add mod">
-          <ac:chgData name="Subir Parida" userId="5adae42a5ff17c16" providerId="LiveId" clId="{E7F114A3-2290-493E-A215-0EC9B9C80270}" dt="2024-02-03T20:37:38.282" v="236" actId="1036"/>
+        <pc:picChg chg="add del mod">
+          <ac:chgData name="Subir Parida" userId="5adae42a5ff17c16" providerId="LiveId" clId="{E7F114A3-2290-493E-A215-0EC9B9C80270}" dt="2024-02-05T16:31:27.032" v="281" actId="478"/>
           <ac:picMkLst>
             <pc:docMk/>
             <pc:sldMk cId="2355974788" sldId="334"/>
             <ac:picMk id="7" creationId="{6AE1CF72-531A-3C97-5D1E-FDE53581E49A}"/>
+          </ac:picMkLst>
+        </pc:picChg>
+        <pc:picChg chg="add mod">
+          <ac:chgData name="Subir Parida" userId="5adae42a5ff17c16" providerId="LiveId" clId="{E7F114A3-2290-493E-A215-0EC9B9C80270}" dt="2024-02-05T16:31:35.194" v="340" actId="1035"/>
+          <ac:picMkLst>
+            <pc:docMk/>
+            <pc:sldMk cId="2355974788" sldId="334"/>
+            <ac:picMk id="9" creationId="{B4463845-4CD1-F734-D7A0-0710D0F5ADE4}"/>
           </ac:picMkLst>
         </pc:picChg>
         <pc:picChg chg="del">
@@ -264,8 +280,8 @@
             <ac:picMk id="10" creationId="{00000000-0000-0000-0000-000000000000}"/>
           </ac:picMkLst>
         </pc:picChg>
-        <pc:picChg chg="add mod">
-          <ac:chgData name="Subir Parida" userId="5adae42a5ff17c16" providerId="LiveId" clId="{E7F114A3-2290-493E-A215-0EC9B9C80270}" dt="2024-02-03T20:37:38.282" v="236" actId="1036"/>
+        <pc:picChg chg="add del mod">
+          <ac:chgData name="Subir Parida" userId="5adae42a5ff17c16" providerId="LiveId" clId="{E7F114A3-2290-493E-A215-0EC9B9C80270}" dt="2024-02-05T16:31:27.032" v="281" actId="478"/>
           <ac:picMkLst>
             <pc:docMk/>
             <pc:sldMk cId="2355974788" sldId="334"/>
@@ -273,7 +289,15 @@
           </ac:picMkLst>
         </pc:picChg>
         <pc:picChg chg="add mod">
-          <ac:chgData name="Subir Parida" userId="5adae42a5ff17c16" providerId="LiveId" clId="{E7F114A3-2290-493E-A215-0EC9B9C80270}" dt="2024-02-03T20:37:38.282" v="236" actId="1036"/>
+          <ac:chgData name="Subir Parida" userId="5adae42a5ff17c16" providerId="LiveId" clId="{E7F114A3-2290-493E-A215-0EC9B9C80270}" dt="2024-02-05T16:31:35.194" v="340" actId="1035"/>
+          <ac:picMkLst>
+            <pc:docMk/>
+            <pc:sldMk cId="2355974788" sldId="334"/>
+            <ac:picMk id="12" creationId="{C3CDB019-A87E-5529-00CB-0FBC401B8E2F}"/>
+          </ac:picMkLst>
+        </pc:picChg>
+        <pc:picChg chg="add del mod">
+          <ac:chgData name="Subir Parida" userId="5adae42a5ff17c16" providerId="LiveId" clId="{E7F114A3-2290-493E-A215-0EC9B9C80270}" dt="2024-02-05T16:31:27.032" v="281" actId="478"/>
           <ac:picMkLst>
             <pc:docMk/>
             <pc:sldMk cId="2355974788" sldId="334"/>
@@ -26206,7 +26230,7 @@
           <a:p>
             <a:fld id="{FE9DB346-41A7-4E73-A0DA-000F1C5CB949}" type="datetimeFigureOut">
               <a:rPr lang="en-US" smtClean="0"/>
-              <a:t>2/4/2024</a:t>
+              <a:t>2/5/2024</a:t>
             </a:fld>
             <a:endParaRPr lang="en-US"/>
           </a:p>
@@ -26374,7 +26398,7 @@
           <a:p>
             <a:fld id="{FE9DB346-41A7-4E73-A0DA-000F1C5CB949}" type="datetimeFigureOut">
               <a:rPr lang="en-US" smtClean="0"/>
-              <a:t>2/4/2024</a:t>
+              <a:t>2/5/2024</a:t>
             </a:fld>
             <a:endParaRPr lang="en-US"/>
           </a:p>
@@ -26552,7 +26576,7 @@
           <a:p>
             <a:fld id="{FE9DB346-41A7-4E73-A0DA-000F1C5CB949}" type="datetimeFigureOut">
               <a:rPr lang="en-US" smtClean="0"/>
-              <a:t>2/4/2024</a:t>
+              <a:t>2/5/2024</a:t>
             </a:fld>
             <a:endParaRPr lang="en-US"/>
           </a:p>
@@ -26720,7 +26744,7 @@
           <a:p>
             <a:fld id="{FE9DB346-41A7-4E73-A0DA-000F1C5CB949}" type="datetimeFigureOut">
               <a:rPr lang="en-US" smtClean="0"/>
-              <a:t>2/4/2024</a:t>
+              <a:t>2/5/2024</a:t>
             </a:fld>
             <a:endParaRPr lang="en-US"/>
           </a:p>
@@ -26965,7 +26989,7 @@
           <a:p>
             <a:fld id="{FE9DB346-41A7-4E73-A0DA-000F1C5CB949}" type="datetimeFigureOut">
               <a:rPr lang="en-US" smtClean="0"/>
-              <a:t>2/4/2024</a:t>
+              <a:t>2/5/2024</a:t>
             </a:fld>
             <a:endParaRPr lang="en-US"/>
           </a:p>
@@ -27194,7 +27218,7 @@
           <a:p>
             <a:fld id="{FE9DB346-41A7-4E73-A0DA-000F1C5CB949}" type="datetimeFigureOut">
               <a:rPr lang="en-US" smtClean="0"/>
-              <a:t>2/4/2024</a:t>
+              <a:t>2/5/2024</a:t>
             </a:fld>
             <a:endParaRPr lang="en-US"/>
           </a:p>
@@ -27558,7 +27582,7 @@
           <a:p>
             <a:fld id="{FE9DB346-41A7-4E73-A0DA-000F1C5CB949}" type="datetimeFigureOut">
               <a:rPr lang="en-US" smtClean="0"/>
-              <a:t>2/4/2024</a:t>
+              <a:t>2/5/2024</a:t>
             </a:fld>
             <a:endParaRPr lang="en-US"/>
           </a:p>
@@ -27675,7 +27699,7 @@
           <a:p>
             <a:fld id="{FE9DB346-41A7-4E73-A0DA-000F1C5CB949}" type="datetimeFigureOut">
               <a:rPr lang="en-US" smtClean="0"/>
-              <a:t>2/4/2024</a:t>
+              <a:t>2/5/2024</a:t>
             </a:fld>
             <a:endParaRPr lang="en-US"/>
           </a:p>
@@ -27770,7 +27794,7 @@
           <a:p>
             <a:fld id="{FE9DB346-41A7-4E73-A0DA-000F1C5CB949}" type="datetimeFigureOut">
               <a:rPr lang="en-US" smtClean="0"/>
-              <a:t>2/4/2024</a:t>
+              <a:t>2/5/2024</a:t>
             </a:fld>
             <a:endParaRPr lang="en-US"/>
           </a:p>
@@ -28045,7 +28069,7 @@
           <a:p>
             <a:fld id="{FE9DB346-41A7-4E73-A0DA-000F1C5CB949}" type="datetimeFigureOut">
               <a:rPr lang="en-US" smtClean="0"/>
-              <a:t>2/4/2024</a:t>
+              <a:t>2/5/2024</a:t>
             </a:fld>
             <a:endParaRPr lang="en-US"/>
           </a:p>
@@ -28297,7 +28321,7 @@
           <a:p>
             <a:fld id="{FE9DB346-41A7-4E73-A0DA-000F1C5CB949}" type="datetimeFigureOut">
               <a:rPr lang="en-US" smtClean="0"/>
-              <a:t>2/4/2024</a:t>
+              <a:t>2/5/2024</a:t>
             </a:fld>
             <a:endParaRPr lang="en-US"/>
           </a:p>
@@ -28508,7 +28532,7 @@
           <a:p>
             <a:fld id="{FE9DB346-41A7-4E73-A0DA-000F1C5CB949}" type="datetimeFigureOut">
               <a:rPr lang="en-US" smtClean="0"/>
-              <a:t>2/4/2024</a:t>
+              <a:t>2/5/2024</a:t>
             </a:fld>
             <a:endParaRPr lang="en-US"/>
           </a:p>
@@ -31997,10 +32021,10 @@
       </p:sp>
       <p:pic>
         <p:nvPicPr>
-          <p:cNvPr id="7" name="Picture 6">
+          <p:cNvPr id="3" name="Picture 2">
             <a:extLst>
               <a:ext uri="{FF2B5EF4-FFF2-40B4-BE49-F238E27FC236}">
-                <a16:creationId xmlns:a16="http://schemas.microsoft.com/office/drawing/2014/main" id="{6AE1CF72-531A-3C97-5D1E-FDE53581E49A}"/>
+                <a16:creationId xmlns:a16="http://schemas.microsoft.com/office/drawing/2014/main" id="{659B19E9-060C-762A-5F2F-783F84DB5F4D}"/>
               </a:ext>
             </a:extLst>
           </p:cNvPr>
@@ -32023,7 +32047,7 @@
         </p:blipFill>
         <p:spPr>
           <a:xfrm>
-            <a:off x="7733924" y="981600"/>
+            <a:off x="7733924" y="975678"/>
             <a:ext cx="4140000" cy="2484000"/>
           </a:xfrm>
           <a:prstGeom prst="rect">
@@ -32033,10 +32057,10 @@
       </p:pic>
       <p:pic>
         <p:nvPicPr>
-          <p:cNvPr id="11" name="Picture 10">
+          <p:cNvPr id="9" name="Picture 8">
             <a:extLst>
               <a:ext uri="{FF2B5EF4-FFF2-40B4-BE49-F238E27FC236}">
-                <a16:creationId xmlns:a16="http://schemas.microsoft.com/office/drawing/2014/main" id="{54E614DC-D379-5426-EB32-969325D46BFA}"/>
+                <a16:creationId xmlns:a16="http://schemas.microsoft.com/office/drawing/2014/main" id="{B4463845-4CD1-F734-D7A0-0710D0F5ADE4}"/>
               </a:ext>
             </a:extLst>
           </p:cNvPr>
@@ -32059,7 +32083,7 @@
         </p:blipFill>
         <p:spPr>
           <a:xfrm>
-            <a:off x="3972622" y="986100"/>
+            <a:off x="3972623" y="980178"/>
             <a:ext cx="3960000" cy="2475000"/>
           </a:xfrm>
           <a:prstGeom prst="rect">
@@ -32069,10 +32093,10 @@
       </p:pic>
       <p:pic>
         <p:nvPicPr>
-          <p:cNvPr id="13" name="Picture 12">
+          <p:cNvPr id="12" name="Picture 11">
             <a:extLst>
               <a:ext uri="{FF2B5EF4-FFF2-40B4-BE49-F238E27FC236}">
-                <a16:creationId xmlns:a16="http://schemas.microsoft.com/office/drawing/2014/main" id="{7D7DDF41-BB9E-66F0-E3B4-98AA6CD63B18}"/>
+                <a16:creationId xmlns:a16="http://schemas.microsoft.com/office/drawing/2014/main" id="{C3CDB019-A87E-5529-00CB-0FBC401B8E2F}"/>
               </a:ext>
             </a:extLst>
           </p:cNvPr>
@@ -32095,7 +32119,7 @@
         </p:blipFill>
         <p:spPr>
           <a:xfrm>
-            <a:off x="211321" y="986100"/>
+            <a:off x="211321" y="980178"/>
             <a:ext cx="3960000" cy="2475000"/>
           </a:xfrm>
           <a:prstGeom prst="rect">
